--- a/public/templates/subject-template.pptx
+++ b/public/templates/subject-template.pptx
@@ -3828,18 +3828,18 @@
           <a:lstStyle/>
           <a:p>
             <a:r>
-              <a:rPr lang="en-US" sz="2600" dirty="0">
-                <a:latin typeface="Arial Black" pitchFamily="34" charset="0"/>
+              <a:rPr b="1" lang="en-US" sz="2600" dirty="0">
+                <a:latin typeface="Arial"/>
               </a:rPr>
               <a:t>ANALISA SIGINT </a:t>
             </a:r>
             <a:br>
-              <a:rPr lang="en-US" sz="2600" dirty="0">
-                <a:latin typeface="Arial Black" pitchFamily="34" charset="0"/>
+              <a:rPr b="1" lang="en-US" sz="2600" dirty="0">
+                <a:latin typeface="Arial"/>
               </a:rPr>
             </a:br>
-            <a:endParaRPr lang="en-US" sz="1950" dirty="0">
-              <a:latin typeface="Arial Black" pitchFamily="34" charset="0"/>
+            <a:endParaRPr b="1" lang="en-US" sz="2600" dirty="0">
+              <a:latin typeface="Arial"/>
             </a:endParaRPr>
           </a:p>
         </p:txBody>
@@ -3872,7 +3872,7 @@
                 <a:solidFill>
                   <a:schemeClr val="tx1"/>
                 </a:solidFill>
-                <a:latin typeface="Arial" panose="020B0604020202020204" pitchFamily="34" charset="0"/>
+                <a:latin typeface="Arial"/>
                 <a:cs typeface="Arial" panose="020B0604020202020204" pitchFamily="34" charset="0"/>
               </a:rPr>
               <a:t>SUBJECT TERINDIKASI :
@@ -4093,245 +4093,13 @@
         </p:spPr>
         <p:txBody>
           <a:bodyPr wrap="square">
-            <a:spAutoFit/>
+            <a:normAutofit/>
           </a:bodyPr>
           <a:lstStyle/>
           <a:p>
             <a:r>
-              <a:rPr lang="en-ID" sz="1400" b="1" dirty="0"/>
+              <a:rPr lang="en-ID" sz="1100" b="1" dirty="0"/>
               <a:t>{{short_background}}</a:t>
-            </a:r>
-            <a:r>
-              <a:rPr lang="en-ID" sz="1400" dirty="0" err="1"/>
-              <a:t/>
-            </a:r>
-            <a:r>
-              <a:rPr lang="en-ID" sz="1400" dirty="0"/>
-              <a:t/>
-            </a:r>
-            <a:r>
-              <a:rPr lang="en-ID" sz="1400" dirty="0" err="1"/>
-              <a:t/>
-            </a:r>
-            <a:r>
-              <a:rPr lang="en-ID" sz="1400" dirty="0"/>
-              <a:t/>
-            </a:r>
-            <a:r>
-              <a:rPr lang="en-ID" sz="1400" dirty="0" err="1"/>
-              <a:t/>
-            </a:r>
-            <a:r>
-              <a:rPr lang="en-ID" sz="1400" dirty="0"/>
-              <a:t/>
-            </a:r>
-            <a:r>
-              <a:rPr lang="en-ID" sz="1400" dirty="0" err="1"/>
-              <a:t/>
-            </a:r>
-            <a:r>
-              <a:rPr lang="en-ID" sz="1400" dirty="0"/>
-              <a:t/>
-            </a:r>
-            <a:r>
-              <a:rPr lang="en-ID" sz="1400" dirty="0" err="1"/>
-              <a:t/>
-            </a:r>
-            <a:r>
-              <a:rPr lang="en-ID" sz="1400" dirty="0"/>
-              <a:t/>
-            </a:r>
-            <a:r>
-              <a:rPr lang="en-ID" sz="1400" dirty="0" err="1"/>
-              <a:t/>
-            </a:r>
-            <a:r>
-              <a:rPr lang="en-ID" sz="1400" dirty="0"/>
-              <a:t/>
-            </a:r>
-            <a:r>
-              <a:rPr lang="en-ID" sz="1400" dirty="0" err="1"/>
-              <a:t/>
-            </a:r>
-            <a:r>
-              <a:rPr lang="en-ID" sz="1400" dirty="0"/>
-              <a:t/>
-            </a:r>
-            <a:r>
-              <a:rPr lang="en-ID" sz="1400" dirty="0" err="1"/>
-              <a:t/>
-            </a:r>
-            <a:r>
-              <a:rPr lang="en-ID" sz="1400" dirty="0"/>
-              <a:t/>
-            </a:r>
-            <a:r>
-              <a:rPr lang="en-ID" sz="1400" dirty="0" err="1"/>
-              <a:t/>
-            </a:r>
-            <a:r>
-              <a:rPr lang="en-ID" sz="1400" dirty="0"/>
-              <a:t/>
-            </a:r>
-            <a:r>
-              <a:rPr lang="en-ID" sz="1400" dirty="0" err="1"/>
-              <a:t/>
-            </a:r>
-            <a:r>
-              <a:rPr lang="en-ID" sz="1400" dirty="0"/>
-              <a:t/>
-            </a:r>
-            <a:r>
-              <a:rPr lang="en-ID" sz="1400" dirty="0" err="1"/>
-              <a:t/>
-            </a:r>
-            <a:r>
-              <a:rPr lang="en-ID" sz="1400" dirty="0"/>
-              <a:t/>
-            </a:r>
-            <a:r>
-              <a:rPr lang="en-ID" sz="1400" dirty="0" err="1"/>
-              <a:t/>
-            </a:r>
-            <a:r>
-              <a:rPr lang="en-ID" sz="1400" dirty="0"/>
-              <a:t/>
-            </a:r>
-            <a:r>
-              <a:rPr lang="en-ID" sz="1400" dirty="0" err="1"/>
-              <a:t/>
-            </a:r>
-            <a:r>
-              <a:rPr lang="en-ID" sz="1400" dirty="0"/>
-              <a:t/>
-            </a:r>
-            <a:r>
-              <a:rPr lang="en-ID" sz="1400" dirty="0" err="1"/>
-              <a:t/>
-            </a:r>
-            <a:r>
-              <a:rPr lang="en-ID" sz="1400" dirty="0"/>
-              <a:t/>
-            </a:r>
-            <a:r>
-              <a:rPr lang="en-ID" sz="1400" dirty="0" err="1"/>
-              <a:t/>
-            </a:r>
-            <a:r>
-              <a:rPr lang="en-ID" sz="1400" dirty="0"/>
-              <a:t/>
-            </a:r>
-            <a:r>
-              <a:rPr lang="en-ID" sz="1400" dirty="0" err="1"/>
-              <a:t/>
-            </a:r>
-            <a:r>
-              <a:rPr lang="en-ID" sz="1400" dirty="0"/>
-              <a:t/>
-            </a:r>
-            <a:r>
-              <a:rPr lang="en-ID" sz="1400" dirty="0" err="1"/>
-              <a:t/>
-            </a:r>
-            <a:r>
-              <a:rPr lang="en-ID" sz="1400" dirty="0"/>
-              <a:t/>
-            </a:r>
-            <a:r>
-              <a:rPr lang="en-ID" sz="1400" dirty="0" err="1"/>
-              <a:t/>
-            </a:r>
-            <a:r>
-              <a:rPr lang="en-ID" sz="1400" dirty="0"/>
-              <a:t/>
-            </a:r>
-            <a:r>
-              <a:rPr lang="en-ID" sz="1400" dirty="0" err="1"/>
-              <a:t/>
-            </a:r>
-            <a:r>
-              <a:rPr lang="en-ID" sz="1400" dirty="0"/>
-              <a:t/>
-            </a:r>
-            <a:r>
-              <a:rPr lang="en-ID" sz="1400" dirty="0" err="1"/>
-              <a:t/>
-            </a:r>
-            <a:r>
-              <a:rPr lang="en-ID" sz="1400" dirty="0"/>
-              <a:t/>
-            </a:r>
-            <a:r>
-              <a:rPr lang="en-ID" sz="1400" dirty="0" err="1"/>
-              <a:t/>
-            </a:r>
-            <a:r>
-              <a:rPr lang="en-ID" sz="1400" dirty="0"/>
-              <a:t/>
-            </a:r>
-            <a:r>
-              <a:rPr lang="en-ID" sz="1400" dirty="0" err="1"/>
-              <a:t/>
-            </a:r>
-            <a:r>
-              <a:rPr lang="en-ID" sz="1400" dirty="0"/>
-              <a:t/>
-            </a:r>
-            <a:r>
-              <a:rPr lang="en-ID" sz="1400" dirty="0" err="1"/>
-              <a:t/>
-            </a:r>
-            <a:r>
-              <a:rPr lang="en-ID" sz="1400" dirty="0"/>
-              <a:t/>
-            </a:r>
-            <a:r>
-              <a:rPr lang="en-ID" sz="1400" dirty="0" err="1"/>
-              <a:t/>
-            </a:r>
-            <a:r>
-              <a:rPr lang="en-ID" sz="1400" dirty="0"/>
-              <a:t/>
-            </a:r>
-            <a:r>
-              <a:rPr lang="en-ID" sz="1400" dirty="0" err="1"/>
-              <a:t/>
-            </a:r>
-            <a:r>
-              <a:rPr lang="en-ID" sz="1400" dirty="0"/>
-              <a:t/>
-            </a:r>
-            <a:r>
-              <a:rPr lang="en-ID" sz="1400" dirty="0" err="1"/>
-              <a:t/>
-            </a:r>
-            <a:r>
-              <a:rPr lang="en-ID" sz="1400" dirty="0"/>
-              <a:t/>
-            </a:r>
-            <a:r>
-              <a:rPr lang="en-ID" sz="1400" dirty="0" err="1"/>
-              <a:t/>
-            </a:r>
-            <a:r>
-              <a:rPr lang="en-ID" sz="1400" dirty="0"/>
-              <a:t/>
-            </a:r>
-            <a:r>
-              <a:rPr lang="en-ID" sz="1400" dirty="0" err="1"/>
-              <a:t/>
-            </a:r>
-            <a:r>
-              <a:rPr lang="en-ID" sz="1400" dirty="0"/>
-              <a:t/>
-            </a:r>
-            <a:r>
-              <a:rPr lang="en-ID" sz="1400" dirty="0" err="1"/>
-              <a:t/>
-            </a:r>
-            <a:r>
-              <a:rPr lang="en-ID" sz="1400" dirty="0"/>
-              <a:t/>
             </a:r>
           </a:p>
         </p:txBody>
@@ -4495,10 +4263,6 @@
                       <a:r>
                         <a:rPr lang="en-ID" sz="1100" dirty="0" err="1"/>
                         <a:t>{{birth_line}}</a:t>
-                      </a:r>
-                      <a:r>
-                        <a:rPr lang="en-ID" sz="1100" dirty="0"/>
-                        <a:t/>
                       </a:r>
                     </a:p>
                   </a:txBody>
@@ -4741,14 +4505,6 @@
                         <a:rPr lang="en-ID" sz="1100" b="1" dirty="0"/>
                         <a:t>Pendidikan</a:t>
                       </a:r>
-                      <a:r>
-                        <a:rPr lang="en-ID" sz="1100" b="1" dirty="0" err="1"/>
-                        <a:t/>
-                      </a:r>
-                      <a:r>
-                        <a:rPr lang="en-ID" sz="1100" b="1" dirty="0"/>
-                        <a:t/>
-                      </a:r>
                     </a:p>
                   </a:txBody>
                   <a:tcPr anchor="ctr">
@@ -4847,54 +4603,6 @@
                         <a:rPr lang="en-ID" sz="1100" dirty="0" err="1"/>
                         <a:t>{{issue}}</a:t>
                       </a:r>
-                      <a:r>
-                        <a:rPr lang="en-ID" sz="1100" dirty="0"/>
-                        <a:t/>
-                      </a:r>
-                      <a:r>
-                        <a:rPr lang="en-ID" sz="1100" dirty="0" err="1"/>
-                        <a:t/>
-                      </a:r>
-                      <a:r>
-                        <a:rPr lang="en-ID" sz="1100" dirty="0"/>
-                        <a:t/>
-                      </a:r>
-                      <a:r>
-                        <a:rPr lang="en-ID" sz="1100" dirty="0" err="1"/>
-                        <a:t/>
-                      </a:r>
-                      <a:r>
-                        <a:rPr lang="en-ID" sz="1100" dirty="0"/>
-                        <a:t/>
-                      </a:r>
-                      <a:r>
-                        <a:rPr lang="en-ID" sz="1100" dirty="0" err="1"/>
-                        <a:t/>
-                      </a:r>
-                      <a:r>
-                        <a:rPr lang="en-ID" sz="1100" dirty="0"/>
-                        <a:t/>
-                      </a:r>
-                      <a:r>
-                        <a:rPr lang="en-ID" sz="1100" dirty="0" err="1"/>
-                        <a:t/>
-                      </a:r>
-                      <a:r>
-                        <a:rPr lang="en-ID" sz="1100" dirty="0"/>
-                        <a:t/>
-                      </a:r>
-                      <a:r>
-                        <a:rPr lang="en-ID" sz="1100" dirty="0" err="1"/>
-                        <a:t/>
-                      </a:r>
-                      <a:r>
-                        <a:rPr lang="en-ID" sz="1100" dirty="0"/>
-                        <a:t/>
-                      </a:r>
-                      <a:r>
-                        <a:rPr lang="en-ID" sz="1100" dirty="0" err="1"/>
-                        <a:t/>
-                      </a:r>
                       <a:endParaRPr lang="en-ID" sz="1100" dirty="0"/>
                     </a:p>
                   </a:txBody>
@@ -4963,62 +4671,6 @@
                         <a:rPr lang="en-ID" sz="1100" dirty="0" err="1"/>
                         <a:t>{{role}}</a:t>
                       </a:r>
-                      <a:r>
-                        <a:rPr lang="en-ID" sz="1100" dirty="0"/>
-                        <a:t/>
-                      </a:r>
-                      <a:r>
-                        <a:rPr lang="en-ID" sz="1100" dirty="0" err="1"/>
-                        <a:t/>
-                      </a:r>
-                      <a:r>
-                        <a:rPr lang="en-ID" sz="1100" dirty="0"/>
-                        <a:t/>
-                      </a:r>
-                      <a:r>
-                        <a:rPr lang="en-ID" sz="1100" dirty="0" err="1"/>
-                        <a:t/>
-                      </a:r>
-                      <a:r>
-                        <a:rPr lang="en-ID" sz="1100" dirty="0"/>
-                        <a:t/>
-                      </a:r>
-                      <a:r>
-                        <a:rPr lang="en-ID" sz="1100" dirty="0" err="1"/>
-                        <a:t/>
-                      </a:r>
-                      <a:r>
-                        <a:rPr lang="en-ID" sz="1100" dirty="0"/>
-                        <a:t/>
-                      </a:r>
-                      <a:r>
-                        <a:rPr lang="en-ID" sz="1100" dirty="0" err="1"/>
-                        <a:t/>
-                      </a:r>
-                      <a:r>
-                        <a:rPr lang="en-ID" sz="1100" dirty="0"/>
-                        <a:t/>
-                      </a:r>
-                      <a:r>
-                        <a:rPr lang="en-ID" sz="1100" dirty="0" err="1"/>
-                        <a:t/>
-                      </a:r>
-                      <a:r>
-                        <a:rPr lang="en-ID" sz="1100" dirty="0"/>
-                        <a:t/>
-                      </a:r>
-                      <a:r>
-                        <a:rPr lang="en-ID" sz="1100" dirty="0" err="1"/>
-                        <a:t/>
-                      </a:r>
-                      <a:r>
-                        <a:rPr lang="en-ID" sz="1100" dirty="0"/>
-                        <a:t/>
-                      </a:r>
-                      <a:r>
-                        <a:rPr lang="en-ID" sz="1100" dirty="0" err="1"/>
-                        <a:t/>
-                      </a:r>
                       <a:endParaRPr lang="en-ID" sz="1100" dirty="0"/>
                     </a:p>
                   </a:txBody>
@@ -5139,19 +4791,19 @@
           <a:lstStyle/>
           <a:p>
             <a:r>
-              <a:rPr lang="en-US" sz="2000">
+              <a:rPr b="1" lang="en-US" sz="2000">
                 <a:solidFill>
                   <a:srgbClr val="004E9A"/>
                 </a:solidFill>
-                <a:latin typeface="Arial Black" panose="020B0A04020102020204" pitchFamily="34" charset="0"/>
+                <a:latin typeface="Arial"/>
               </a:rPr>
               <a:t>JAKNIK SUBJECT</a:t>
             </a:r>
-            <a:endParaRPr lang="en-US" sz="2000" dirty="0">
+            <a:endParaRPr b="1" lang="en-US" sz="2000" dirty="0">
               <a:solidFill>
                 <a:srgbClr val="004E9A"/>
               </a:solidFill>
-              <a:latin typeface="Arial Black" panose="020B0A04020102020204" pitchFamily="34" charset="0"/>
+              <a:latin typeface="Arial"/>
             </a:endParaRPr>
           </a:p>
         </p:txBody>
@@ -5572,12 +5224,12 @@
         </p:spPr>
         <p:txBody>
           <a:bodyPr wrap="square">
-            <a:spAutoFit/>
+            <a:normAutofit/>
           </a:bodyPr>
           <a:lstStyle/>
           <a:p>
             <a:r>
-              <a:rPr lang="en-ID" sz="900" dirty="0"/>
+              <a:rPr lang="en-ID" sz="1100" dirty="0"/>
               <a:t>{{summary}}</a:t>
             </a:r>
           </a:p>
@@ -5607,7 +5259,7 @@
         </p:spPr>
         <p:txBody>
           <a:bodyPr wrap="square">
-            <a:spAutoFit/>
+            <a:normAutofit/>
           </a:bodyPr>
           <a:lstStyle/>
           <a:p>
@@ -5648,7 +5300,7 @@
         </p:spPr>
         <p:txBody>
           <a:bodyPr wrap="square">
-            <a:spAutoFit/>
+            <a:normAutofit/>
           </a:bodyPr>
           <a:lstStyle/>
           <a:p>
@@ -5656,8 +5308,8 @@
               <a:spcBef>
                 <a:spcPts val="600"/>
               </a:spcBef>
-              <a:buFont typeface="Wingdings" panose="05000000000000000000" pitchFamily="2" charset="2"/>
-              <a:buChar char="§"/>
+              <a:buFont typeface="Arial" panose="020B0604020202020204" pitchFamily="34" charset="0"/>
+              <a:buChar char="•"/>
             </a:pPr>
             <a:r>
               <a:rPr lang="en-ID" sz="1100" dirty="0"/>
@@ -5690,7 +5342,7 @@
         </p:spPr>
         <p:txBody>
           <a:bodyPr wrap="square">
-            <a:spAutoFit/>
+            <a:normAutofit/>
           </a:bodyPr>
           <a:lstStyle/>
           <a:p>
@@ -5699,8 +5351,8 @@
               <a:buChar char="•"/>
             </a:pPr>
             <a:r>
-              <a:rPr lang="en-ID" sz="1050" dirty="0">
-                <a:latin typeface="Arial" panose="020B0604020202020204" pitchFamily="34" charset="0"/>
+              <a:rPr lang="en-ID" sz="1100" dirty="0">
+                <a:latin typeface="Arial"/>
                 <a:cs typeface="Arial" panose="020B0604020202020204" pitchFamily="34" charset="0"/>
               </a:rPr>
               <a:t>{{issue_context}}</a:t>
@@ -5734,7 +5386,7 @@
         </p:spPr>
         <p:txBody>
           <a:bodyPr wrap="square">
-            <a:spAutoFit/>
+            <a:normAutofit/>
           </a:bodyPr>
           <a:lstStyle/>
           <a:p>
@@ -5746,18 +5398,11 @@
               <a:buChar char="•"/>
             </a:pPr>
             <a:r>
-              <a:rPr lang="en-ID" sz="1000" b="1" dirty="0">
-                <a:latin typeface="Arial" panose="020B0604020202020204" pitchFamily="34" charset="0"/>
+              <a:rPr lang="en-ID" sz="1100" b="1" dirty="0">
+                <a:latin typeface="Arial"/>
                 <a:cs typeface="Arial" panose="020B0604020202020204" pitchFamily="34" charset="0"/>
               </a:rPr>
               <a:t>{{public_activity}}</a:t>
-            </a:r>
-            <a:r>
-              <a:rPr lang="en-ID" sz="1000" dirty="0">
-                <a:latin typeface="Arial" panose="020B0604020202020204" pitchFamily="34" charset="0"/>
-                <a:cs typeface="Arial" panose="020B0604020202020204" pitchFamily="34" charset="0"/>
-              </a:rPr>
-              <a:t/>
             </a:r>
           </a:p>
         </p:txBody>
@@ -5786,7 +5431,7 @@
         </p:spPr>
         <p:txBody>
           <a:bodyPr wrap="square">
-            <a:spAutoFit/>
+            <a:normAutofit/>
           </a:bodyPr>
           <a:lstStyle/>
           <a:p>
@@ -5796,17 +5441,10 @@
             </a:pPr>
             <a:r>
               <a:rPr lang="en-ID" sz="1100" b="1" dirty="0">
-                <a:latin typeface="Arial" panose="020B0604020202020204" pitchFamily="34" charset="0"/>
+                <a:latin typeface="Arial"/>
                 <a:cs typeface="Arial" panose="020B0604020202020204" pitchFamily="34" charset="0"/>
               </a:rPr>
               <a:t>{{regions}}</a:t>
-            </a:r>
-            <a:r>
-              <a:rPr lang="en-ID" sz="1100" dirty="0">
-                <a:latin typeface="Arial" panose="020B0604020202020204" pitchFamily="34" charset="0"/>
-                <a:cs typeface="Arial" panose="020B0604020202020204" pitchFamily="34" charset="0"/>
-              </a:rPr>
-              <a:t/>
             </a:r>
           </a:p>
         </p:txBody>
@@ -5835,7 +5473,7 @@
         </p:spPr>
         <p:txBody>
           <a:bodyPr wrap="square">
-            <a:spAutoFit/>
+            <a:normAutofit/>
           </a:bodyPr>
           <a:lstStyle/>
           <a:p>
@@ -5844,7 +5482,7 @@
               <a:buChar char="•"/>
             </a:pPr>
             <a:r>
-              <a:rPr lang="en-ID" sz="1400" b="1" dirty="0">
+              <a:rPr lang="en-ID" sz="1100" b="1" dirty="0">
                 <a:cs typeface="Arial" panose="020B0604020202020204" pitchFamily="34" charset="0"/>
               </a:rPr>
               <a:t>{{events}}</a:t>
@@ -5883,13 +5521,13 @@
             <a:pPr algn="ctr"/>
             <a:r>
               <a:rPr lang="en-ID" sz="2000" b="1" dirty="0">
-                <a:latin typeface="Arial" panose="020B0604020202020204" pitchFamily="34" charset="0"/>
+                <a:latin typeface="Arial"/>
                 <a:cs typeface="Arial" panose="020B0604020202020204" pitchFamily="34" charset="0"/>
               </a:rPr>
               <a:t>{{name_upper}}</a:t>
             </a:r>
             <a:endParaRPr lang="nn-NO" sz="2000" b="1" dirty="0">
-              <a:latin typeface="Arial" panose="020B0604020202020204" pitchFamily="34" charset="0"/>
+              <a:latin typeface="Arial"/>
               <a:ea typeface="Arial" charset="0"/>
               <a:cs typeface="Arial" panose="020B0604020202020204" pitchFamily="34" charset="0"/>
             </a:endParaRPr>
@@ -5984,11 +5622,11 @@
                 <a:spcPct val="0"/>
               </a:spcBef>
               <a:buNone/>
-              <a:defRPr sz="4400" kern="1200">
+              <a:defRPr b="1" sz="2800" kern="1200">
                 <a:solidFill>
                   <a:schemeClr val="tx1"/>
                 </a:solidFill>
-                <a:latin typeface="+mj-lt"/>
+                <a:latin typeface="Arial"/>
                 <a:ea typeface="+mj-ea"/>
                 <a:cs typeface="+mj-cs"/>
               </a:defRPr>
@@ -5996,8 +5634,8 @@
           </a:lstStyle>
           <a:p>
             <a:r>
-              <a:rPr lang="en-US" sz="1950" dirty="0">
-                <a:latin typeface="Arial Black" pitchFamily="34" charset="0"/>
+              <a:rPr b="1" lang="en-US" sz="2800" dirty="0">
+                <a:latin typeface="Arial"/>
               </a:rPr>
               <a:t>ANALISA :</a:t>
             </a:r>
@@ -6065,450 +5703,16 @@
             <a:prstTxWarp prst="textNoShape">
               <a:avLst/>
             </a:prstTxWarp>
-            <a:spAutoFit/>
+            <a:normAutofit/>
           </a:bodyPr>
           <a:lstStyle/>
           <a:p>
             <a:r>
-              <a:rPr lang="en-ID" sz="2000" dirty="0">
-                <a:latin typeface="Arial" panose="020B0604020202020204" pitchFamily="34" charset="0"/>
+              <a:rPr lang="en-ID" sz="1600" dirty="0">
+                <a:latin typeface="Arial"/>
                 <a:cs typeface="Arial" panose="020B0604020202020204" pitchFamily="34" charset="0"/>
               </a:rPr>
               <a:t>{{analysis_list}}</a:t>
-            </a:r>
-            <a:r>
-              <a:rPr lang="en-ID" sz="2000" b="1" dirty="0">
-                <a:latin typeface="Arial" panose="020B0604020202020204" pitchFamily="34" charset="0"/>
-                <a:cs typeface="Arial" panose="020B0604020202020204" pitchFamily="34" charset="0"/>
-              </a:rPr>
-              <a:t/>
-            </a:r>
-            <a:r>
-              <a:rPr lang="en-ID" sz="2000" dirty="0" err="1">
-                <a:latin typeface="Arial" panose="020B0604020202020204" pitchFamily="34" charset="0"/>
-                <a:cs typeface="Arial" panose="020B0604020202020204" pitchFamily="34" charset="0"/>
-              </a:rPr>
-              <a:t/>
-            </a:r>
-            <a:r>
-              <a:rPr lang="en-ID" sz="2000" dirty="0">
-                <a:latin typeface="Arial" panose="020B0604020202020204" pitchFamily="34" charset="0"/>
-                <a:cs typeface="Arial" panose="020B0604020202020204" pitchFamily="34" charset="0"/>
-              </a:rPr>
-              <a:t/>
-            </a:r>
-            <a:r>
-              <a:rPr lang="en-ID" sz="2000" b="1" dirty="0" err="1">
-                <a:latin typeface="Arial" panose="020B0604020202020204" pitchFamily="34" charset="0"/>
-                <a:cs typeface="Arial" panose="020B0604020202020204" pitchFamily="34" charset="0"/>
-              </a:rPr>
-              <a:t/>
-            </a:r>
-            <a:r>
-              <a:rPr lang="en-ID" sz="2000" b="1" dirty="0">
-                <a:latin typeface="Arial" panose="020B0604020202020204" pitchFamily="34" charset="0"/>
-                <a:cs typeface="Arial" panose="020B0604020202020204" pitchFamily="34" charset="0"/>
-              </a:rPr>
-              <a:t/>
-            </a:r>
-            <a:r>
-              <a:rPr lang="en-ID" sz="2000" dirty="0">
-                <a:latin typeface="Arial" panose="020B0604020202020204" pitchFamily="34" charset="0"/>
-                <a:cs typeface="Arial" panose="020B0604020202020204" pitchFamily="34" charset="0"/>
-              </a:rPr>
-              <a:t/>
-            </a:r>
-            <a:r>
-              <a:rPr lang="en-ID" sz="2000" dirty="0" err="1">
-                <a:latin typeface="Arial" panose="020B0604020202020204" pitchFamily="34" charset="0"/>
-                <a:cs typeface="Arial" panose="020B0604020202020204" pitchFamily="34" charset="0"/>
-              </a:rPr>
-              <a:t/>
-            </a:r>
-            <a:r>
-              <a:rPr lang="en-ID" sz="2000" dirty="0">
-                <a:latin typeface="Arial" panose="020B0604020202020204" pitchFamily="34" charset="0"/>
-                <a:cs typeface="Arial" panose="020B0604020202020204" pitchFamily="34" charset="0"/>
-              </a:rPr>
-              <a:t/>
-            </a:r>
-            <a:r>
-              <a:rPr lang="en-ID" sz="2000" dirty="0" err="1">
-                <a:latin typeface="Arial" panose="020B0604020202020204" pitchFamily="34" charset="0"/>
-                <a:cs typeface="Arial" panose="020B0604020202020204" pitchFamily="34" charset="0"/>
-              </a:rPr>
-              <a:t/>
-            </a:r>
-            <a:r>
-              <a:rPr lang="en-ID" sz="2000" dirty="0">
-                <a:latin typeface="Arial" panose="020B0604020202020204" pitchFamily="34" charset="0"/>
-                <a:cs typeface="Arial" panose="020B0604020202020204" pitchFamily="34" charset="0"/>
-              </a:rPr>
-              <a:t/>
-            </a:r>
-            <a:r>
-              <a:rPr lang="en-ID" sz="2000" dirty="0" err="1">
-                <a:latin typeface="Arial" panose="020B0604020202020204" pitchFamily="34" charset="0"/>
-                <a:cs typeface="Arial" panose="020B0604020202020204" pitchFamily="34" charset="0"/>
-              </a:rPr>
-              <a:t/>
-            </a:r>
-            <a:r>
-              <a:rPr lang="en-ID" sz="2000" dirty="0">
-                <a:latin typeface="Arial" panose="020B0604020202020204" pitchFamily="34" charset="0"/>
-                <a:cs typeface="Arial" panose="020B0604020202020204" pitchFamily="34" charset="0"/>
-              </a:rPr>
-              <a:t/>
-            </a:r>
-            <a:r>
-              <a:rPr lang="en-ID" sz="2000" dirty="0" err="1">
-                <a:latin typeface="Arial" panose="020B0604020202020204" pitchFamily="34" charset="0"/>
-                <a:cs typeface="Arial" panose="020B0604020202020204" pitchFamily="34" charset="0"/>
-              </a:rPr>
-              <a:t/>
-            </a:r>
-            <a:r>
-              <a:rPr lang="en-ID" sz="2000" dirty="0">
-                <a:latin typeface="Arial" panose="020B0604020202020204" pitchFamily="34" charset="0"/>
-                <a:cs typeface="Arial" panose="020B0604020202020204" pitchFamily="34" charset="0"/>
-              </a:rPr>
-              <a:t/>
-            </a:r>
-            <a:r>
-              <a:rPr lang="en-ID" sz="2000" dirty="0" err="1">
-                <a:latin typeface="Arial" panose="020B0604020202020204" pitchFamily="34" charset="0"/>
-                <a:cs typeface="Arial" panose="020B0604020202020204" pitchFamily="34" charset="0"/>
-              </a:rPr>
-              <a:t/>
-            </a:r>
-            <a:r>
-              <a:rPr lang="en-ID" sz="2000" dirty="0">
-                <a:latin typeface="Arial" panose="020B0604020202020204" pitchFamily="34" charset="0"/>
-                <a:cs typeface="Arial" panose="020B0604020202020204" pitchFamily="34" charset="0"/>
-              </a:rPr>
-              <a:t/>
-            </a:r>
-            <a:r>
-              <a:rPr lang="en-ID" sz="2000" dirty="0" err="1">
-                <a:latin typeface="Arial" panose="020B0604020202020204" pitchFamily="34" charset="0"/>
-                <a:cs typeface="Arial" panose="020B0604020202020204" pitchFamily="34" charset="0"/>
-              </a:rPr>
-              <a:t/>
-            </a:r>
-            <a:r>
-              <a:rPr lang="en-ID" sz="2000" dirty="0">
-                <a:latin typeface="Arial" panose="020B0604020202020204" pitchFamily="34" charset="0"/>
-                <a:cs typeface="Arial" panose="020B0604020202020204" pitchFamily="34" charset="0"/>
-              </a:rPr>
-              <a:t/>
-            </a:r>
-            <a:r>
-              <a:rPr lang="en-ID" sz="2000" dirty="0" err="1">
-                <a:latin typeface="Arial" panose="020B0604020202020204" pitchFamily="34" charset="0"/>
-                <a:cs typeface="Arial" panose="020B0604020202020204" pitchFamily="34" charset="0"/>
-              </a:rPr>
-              <a:t/>
-            </a:r>
-            <a:r>
-              <a:rPr lang="en-ID" sz="2000" dirty="0">
-                <a:latin typeface="Arial" panose="020B0604020202020204" pitchFamily="34" charset="0"/>
-                <a:cs typeface="Arial" panose="020B0604020202020204" pitchFamily="34" charset="0"/>
-              </a:rPr>
-              <a:t/>
-            </a:r>
-            <a:r>
-              <a:rPr lang="en-ID" sz="2000" dirty="0" err="1">
-                <a:latin typeface="Arial" panose="020B0604020202020204" pitchFamily="34" charset="0"/>
-                <a:cs typeface="Arial" panose="020B0604020202020204" pitchFamily="34" charset="0"/>
-              </a:rPr>
-              <a:t/>
-            </a:r>
-            <a:r>
-              <a:rPr lang="en-ID" sz="2000" dirty="0">
-                <a:latin typeface="Arial" panose="020B0604020202020204" pitchFamily="34" charset="0"/>
-                <a:cs typeface="Arial" panose="020B0604020202020204" pitchFamily="34" charset="0"/>
-              </a:rPr>
-              <a:t/>
-            </a:r>
-            <a:r>
-              <a:rPr lang="en-ID" sz="2000" dirty="0" err="1">
-                <a:latin typeface="Arial" panose="020B0604020202020204" pitchFamily="34" charset="0"/>
-                <a:cs typeface="Arial" panose="020B0604020202020204" pitchFamily="34" charset="0"/>
-              </a:rPr>
-              <a:t/>
-            </a:r>
-            <a:r>
-              <a:rPr lang="en-ID" sz="2000" dirty="0">
-                <a:latin typeface="Arial" panose="020B0604020202020204" pitchFamily="34" charset="0"/>
-                <a:cs typeface="Arial" panose="020B0604020202020204" pitchFamily="34" charset="0"/>
-              </a:rPr>
-              <a:t/>
-            </a:r>
-            <a:r>
-              <a:rPr lang="en-ID" sz="2000" dirty="0" err="1">
-                <a:latin typeface="Arial" panose="020B0604020202020204" pitchFamily="34" charset="0"/>
-                <a:cs typeface="Arial" panose="020B0604020202020204" pitchFamily="34" charset="0"/>
-              </a:rPr>
-              <a:t/>
-            </a:r>
-            <a:r>
-              <a:rPr lang="en-ID" sz="2000" dirty="0">
-                <a:latin typeface="Arial" panose="020B0604020202020204" pitchFamily="34" charset="0"/>
-                <a:cs typeface="Arial" panose="020B0604020202020204" pitchFamily="34" charset="0"/>
-              </a:rPr>
-              <a:t/>
-            </a:r>
-            <a:r>
-              <a:rPr lang="en-ID" sz="2000" dirty="0" err="1">
-                <a:latin typeface="Arial" panose="020B0604020202020204" pitchFamily="34" charset="0"/>
-                <a:cs typeface="Arial" panose="020B0604020202020204" pitchFamily="34" charset="0"/>
-              </a:rPr>
-              <a:t/>
-            </a:r>
-            <a:r>
-              <a:rPr lang="en-ID" sz="2000" dirty="0">
-                <a:latin typeface="Arial" panose="020B0604020202020204" pitchFamily="34" charset="0"/>
-                <a:cs typeface="Arial" panose="020B0604020202020204" pitchFamily="34" charset="0"/>
-              </a:rPr>
-              <a:t/>
-            </a:r>
-            <a:r>
-              <a:rPr lang="en-ID" sz="2000" dirty="0" err="1">
-                <a:latin typeface="Arial" panose="020B0604020202020204" pitchFamily="34" charset="0"/>
-                <a:cs typeface="Arial" panose="020B0604020202020204" pitchFamily="34" charset="0"/>
-              </a:rPr>
-              <a:t/>
-            </a:r>
-            <a:r>
-              <a:rPr lang="en-ID" sz="2000" dirty="0">
-                <a:latin typeface="Arial" panose="020B0604020202020204" pitchFamily="34" charset="0"/>
-                <a:cs typeface="Arial" panose="020B0604020202020204" pitchFamily="34" charset="0"/>
-              </a:rPr>
-              <a:t/>
-            </a:r>
-            <a:r>
-              <a:rPr lang="en-ID" sz="2000" dirty="0" err="1">
-                <a:latin typeface="Arial" panose="020B0604020202020204" pitchFamily="34" charset="0"/>
-                <a:cs typeface="Arial" panose="020B0604020202020204" pitchFamily="34" charset="0"/>
-              </a:rPr>
-              <a:t/>
-            </a:r>
-            <a:r>
-              <a:rPr lang="en-ID" sz="2000" dirty="0">
-                <a:latin typeface="Arial" panose="020B0604020202020204" pitchFamily="34" charset="0"/>
-                <a:cs typeface="Arial" panose="020B0604020202020204" pitchFamily="34" charset="0"/>
-              </a:rPr>
-              <a:t/>
-            </a:r>
-            <a:r>
-              <a:rPr lang="en-ID" sz="2000" dirty="0" err="1">
-                <a:latin typeface="Arial" panose="020B0604020202020204" pitchFamily="34" charset="0"/>
-                <a:cs typeface="Arial" panose="020B0604020202020204" pitchFamily="34" charset="0"/>
-              </a:rPr>
-              <a:t/>
-            </a:r>
-            <a:r>
-              <a:rPr lang="en-ID" sz="2000" dirty="0">
-                <a:latin typeface="Arial" panose="020B0604020202020204" pitchFamily="34" charset="0"/>
-                <a:cs typeface="Arial" panose="020B0604020202020204" pitchFamily="34" charset="0"/>
-              </a:rPr>
-              <a:t/>
-            </a:r>
-            <a:r>
-              <a:rPr lang="en-ID" sz="2000" dirty="0" err="1">
-                <a:latin typeface="Arial" panose="020B0604020202020204" pitchFamily="34" charset="0"/>
-                <a:cs typeface="Arial" panose="020B0604020202020204" pitchFamily="34" charset="0"/>
-              </a:rPr>
-              <a:t/>
-            </a:r>
-            <a:r>
-              <a:rPr lang="en-ID" sz="2000" dirty="0">
-                <a:latin typeface="Arial" panose="020B0604020202020204" pitchFamily="34" charset="0"/>
-                <a:cs typeface="Arial" panose="020B0604020202020204" pitchFamily="34" charset="0"/>
-              </a:rPr>
-              <a:t/>
-            </a:r>
-            <a:r>
-              <a:rPr lang="en-ID" sz="2000" dirty="0" err="1">
-                <a:latin typeface="Arial" panose="020B0604020202020204" pitchFamily="34" charset="0"/>
-                <a:cs typeface="Arial" panose="020B0604020202020204" pitchFamily="34" charset="0"/>
-              </a:rPr>
-              <a:t/>
-            </a:r>
-            <a:r>
-              <a:rPr lang="en-ID" sz="2000" dirty="0">
-                <a:latin typeface="Arial" panose="020B0604020202020204" pitchFamily="34" charset="0"/>
-                <a:cs typeface="Arial" panose="020B0604020202020204" pitchFamily="34" charset="0"/>
-              </a:rPr>
-              <a:t/>
-            </a:r>
-            <a:r>
-              <a:rPr lang="en-ID" sz="2000" dirty="0" err="1">
-                <a:latin typeface="Arial" panose="020B0604020202020204" pitchFamily="34" charset="0"/>
-                <a:cs typeface="Arial" panose="020B0604020202020204" pitchFamily="34" charset="0"/>
-              </a:rPr>
-              <a:t/>
-            </a:r>
-            <a:r>
-              <a:rPr lang="en-ID" sz="2000" dirty="0">
-                <a:latin typeface="Arial" panose="020B0604020202020204" pitchFamily="34" charset="0"/>
-                <a:cs typeface="Arial" panose="020B0604020202020204" pitchFamily="34" charset="0"/>
-              </a:rPr>
-              <a:t/>
-            </a:r>
-            <a:r>
-              <a:rPr lang="en-ID" sz="2000" dirty="0" err="1">
-                <a:latin typeface="Arial" panose="020B0604020202020204" pitchFamily="34" charset="0"/>
-                <a:cs typeface="Arial" panose="020B0604020202020204" pitchFamily="34" charset="0"/>
-              </a:rPr>
-              <a:t/>
-            </a:r>
-            <a:r>
-              <a:rPr lang="en-ID" sz="2000" dirty="0">
-                <a:latin typeface="Arial" panose="020B0604020202020204" pitchFamily="34" charset="0"/>
-                <a:cs typeface="Arial" panose="020B0604020202020204" pitchFamily="34" charset="0"/>
-              </a:rPr>
-              <a:t/>
-            </a:r>
-            <a:r>
-              <a:rPr lang="en-ID" sz="2000" dirty="0" err="1">
-                <a:latin typeface="Arial" panose="020B0604020202020204" pitchFamily="34" charset="0"/>
-                <a:cs typeface="Arial" panose="020B0604020202020204" pitchFamily="34" charset="0"/>
-              </a:rPr>
-              <a:t/>
-            </a:r>
-            <a:r>
-              <a:rPr lang="en-ID" sz="2000" dirty="0">
-                <a:latin typeface="Arial" panose="020B0604020202020204" pitchFamily="34" charset="0"/>
-                <a:cs typeface="Arial" panose="020B0604020202020204" pitchFamily="34" charset="0"/>
-              </a:rPr>
-              <a:t/>
-            </a:r>
-            <a:r>
-              <a:rPr lang="en-ID" sz="2000" dirty="0" err="1">
-                <a:latin typeface="Arial" panose="020B0604020202020204" pitchFamily="34" charset="0"/>
-                <a:cs typeface="Arial" panose="020B0604020202020204" pitchFamily="34" charset="0"/>
-              </a:rPr>
-              <a:t/>
-            </a:r>
-            <a:r>
-              <a:rPr lang="en-ID" sz="2000" dirty="0">
-                <a:latin typeface="Arial" panose="020B0604020202020204" pitchFamily="34" charset="0"/>
-                <a:cs typeface="Arial" panose="020B0604020202020204" pitchFamily="34" charset="0"/>
-              </a:rPr>
-              <a:t/>
-            </a:r>
-            <a:r>
-              <a:rPr lang="en-ID" sz="2000" dirty="0" err="1">
-                <a:latin typeface="Arial" panose="020B0604020202020204" pitchFamily="34" charset="0"/>
-                <a:cs typeface="Arial" panose="020B0604020202020204" pitchFamily="34" charset="0"/>
-              </a:rPr>
-              <a:t/>
-            </a:r>
-            <a:r>
-              <a:rPr lang="en-ID" sz="2000" dirty="0">
-                <a:latin typeface="Arial" panose="020B0604020202020204" pitchFamily="34" charset="0"/>
-                <a:cs typeface="Arial" panose="020B0604020202020204" pitchFamily="34" charset="0"/>
-              </a:rPr>
-              <a:t/>
-            </a:r>
-            <a:r>
-              <a:rPr lang="en-ID" sz="2000" dirty="0" err="1">
-                <a:latin typeface="Arial" panose="020B0604020202020204" pitchFamily="34" charset="0"/>
-                <a:cs typeface="Arial" panose="020B0604020202020204" pitchFamily="34" charset="0"/>
-              </a:rPr>
-              <a:t/>
-            </a:r>
-            <a:r>
-              <a:rPr lang="en-ID" sz="2000" dirty="0">
-                <a:latin typeface="Arial" panose="020B0604020202020204" pitchFamily="34" charset="0"/>
-                <a:cs typeface="Arial" panose="020B0604020202020204" pitchFamily="34" charset="0"/>
-              </a:rPr>
-              <a:t/>
-            </a:r>
-            <a:r>
-              <a:rPr lang="en-ID" sz="2000" dirty="0" err="1">
-                <a:latin typeface="Arial" panose="020B0604020202020204" pitchFamily="34" charset="0"/>
-                <a:cs typeface="Arial" panose="020B0604020202020204" pitchFamily="34" charset="0"/>
-              </a:rPr>
-              <a:t/>
-            </a:r>
-            <a:r>
-              <a:rPr lang="en-ID" sz="2000" dirty="0">
-                <a:latin typeface="Arial" panose="020B0604020202020204" pitchFamily="34" charset="0"/>
-                <a:cs typeface="Arial" panose="020B0604020202020204" pitchFamily="34" charset="0"/>
-              </a:rPr>
-              <a:t/>
-            </a:r>
-            <a:r>
-              <a:rPr lang="en-ID" sz="2000" dirty="0" err="1">
-                <a:latin typeface="Arial" panose="020B0604020202020204" pitchFamily="34" charset="0"/>
-                <a:cs typeface="Arial" panose="020B0604020202020204" pitchFamily="34" charset="0"/>
-              </a:rPr>
-              <a:t/>
-            </a:r>
-            <a:r>
-              <a:rPr lang="en-ID" sz="2000" dirty="0">
-                <a:latin typeface="Arial" panose="020B0604020202020204" pitchFamily="34" charset="0"/>
-                <a:cs typeface="Arial" panose="020B0604020202020204" pitchFamily="34" charset="0"/>
-              </a:rPr>
-              <a:t/>
-            </a:r>
-            <a:r>
-              <a:rPr lang="en-ID" sz="2000" dirty="0" err="1">
-                <a:latin typeface="Arial" panose="020B0604020202020204" pitchFamily="34" charset="0"/>
-                <a:cs typeface="Arial" panose="020B0604020202020204" pitchFamily="34" charset="0"/>
-              </a:rPr>
-              <a:t/>
-            </a:r>
-            <a:r>
-              <a:rPr lang="en-ID" sz="2000" dirty="0">
-                <a:latin typeface="Arial" panose="020B0604020202020204" pitchFamily="34" charset="0"/>
-                <a:cs typeface="Arial" panose="020B0604020202020204" pitchFamily="34" charset="0"/>
-              </a:rPr>
-              <a:t/>
-            </a:r>
-            <a:r>
-              <a:rPr lang="en-ID" sz="2000" dirty="0" err="1">
-                <a:latin typeface="Arial" panose="020B0604020202020204" pitchFamily="34" charset="0"/>
-                <a:cs typeface="Arial" panose="020B0604020202020204" pitchFamily="34" charset="0"/>
-              </a:rPr>
-              <a:t/>
-            </a:r>
-            <a:r>
-              <a:rPr lang="en-ID" sz="2000" dirty="0">
-                <a:latin typeface="Arial" panose="020B0604020202020204" pitchFamily="34" charset="0"/>
-                <a:cs typeface="Arial" panose="020B0604020202020204" pitchFamily="34" charset="0"/>
-              </a:rPr>
-              <a:t/>
-            </a:r>
-            <a:r>
-              <a:rPr lang="en-ID" sz="2000" dirty="0" err="1">
-                <a:latin typeface="Arial" panose="020B0604020202020204" pitchFamily="34" charset="0"/>
-                <a:cs typeface="Arial" panose="020B0604020202020204" pitchFamily="34" charset="0"/>
-              </a:rPr>
-              <a:t/>
-            </a:r>
-            <a:r>
-              <a:rPr lang="en-ID" sz="2000" dirty="0">
-                <a:latin typeface="Arial" panose="020B0604020202020204" pitchFamily="34" charset="0"/>
-                <a:cs typeface="Arial" panose="020B0604020202020204" pitchFamily="34" charset="0"/>
-              </a:rPr>
-              <a:t/>
-            </a:r>
-            <a:r>
-              <a:rPr lang="en-ID" sz="2000" dirty="0" err="1">
-                <a:latin typeface="Arial" panose="020B0604020202020204" pitchFamily="34" charset="0"/>
-                <a:cs typeface="Arial" panose="020B0604020202020204" pitchFamily="34" charset="0"/>
-              </a:rPr>
-              <a:t/>
-            </a:r>
-            <a:r>
-              <a:rPr lang="en-ID" sz="2000" dirty="0">
-                <a:latin typeface="Arial" panose="020B0604020202020204" pitchFamily="34" charset="0"/>
-                <a:cs typeface="Arial" panose="020B0604020202020204" pitchFamily="34" charset="0"/>
-              </a:rPr>
-              <a:t/>
             </a:r>
           </a:p>
         </p:txBody>
@@ -6566,11 +5770,11 @@
                 <a:spcPct val="0"/>
               </a:spcBef>
               <a:buNone/>
-              <a:defRPr sz="4400" kern="1200">
+              <a:defRPr b="1" sz="2800" kern="1200">
                 <a:solidFill>
                   <a:schemeClr val="tx1"/>
                 </a:solidFill>
-                <a:latin typeface="+mj-lt"/>
+                <a:latin typeface="Arial"/>
                 <a:ea typeface="+mj-ea"/>
                 <a:cs typeface="+mj-cs"/>
               </a:defRPr>
@@ -6578,8 +5782,8 @@
           </a:lstStyle>
           <a:p>
             <a:r>
-              <a:rPr lang="en-US" sz="1950" dirty="0">
-                <a:latin typeface="Arial Black" pitchFamily="34" charset="0"/>
+              <a:rPr b="1" lang="en-US" sz="2800" dirty="0">
+                <a:latin typeface="Arial"/>
               </a:rPr>
               <a:t>SARAN :</a:t>
             </a:r>
@@ -6647,409 +5851,17 @@
             <a:prstTxWarp prst="textNoShape">
               <a:avLst/>
             </a:prstTxWarp>
-            <a:spAutoFit/>
+            <a:normAutofit/>
           </a:bodyPr>
           <a:lstStyle/>
           <a:p>
             <a:pPr algn="just"/>
             <a:r>
-              <a:rPr lang="en-ID" dirty="0">
-                <a:latin typeface="Arial" panose="020B0604020202020204" pitchFamily="34" charset="0"/>
+              <a:rPr sz="1600" lang="en-ID" dirty="0">
+                <a:latin typeface="Arial"/>
                 <a:cs typeface="Arial" panose="020B0604020202020204" pitchFamily="34" charset="0"/>
               </a:rPr>
               <a:t>{{recommendations_list}}</a:t>
-            </a:r>
-            <a:r>
-              <a:rPr lang="en-ID" dirty="0" err="1">
-                <a:latin typeface="Arial" panose="020B0604020202020204" pitchFamily="34" charset="0"/>
-                <a:cs typeface="Arial" panose="020B0604020202020204" pitchFamily="34" charset="0"/>
-              </a:rPr>
-              <a:t/>
-            </a:r>
-            <a:r>
-              <a:rPr lang="en-ID" dirty="0">
-                <a:latin typeface="Arial" panose="020B0604020202020204" pitchFamily="34" charset="0"/>
-                <a:cs typeface="Arial" panose="020B0604020202020204" pitchFamily="34" charset="0"/>
-              </a:rPr>
-              <a:t/>
-            </a:r>
-            <a:r>
-              <a:rPr lang="en-ID" dirty="0" err="1">
-                <a:latin typeface="Arial" panose="020B0604020202020204" pitchFamily="34" charset="0"/>
-                <a:cs typeface="Arial" panose="020B0604020202020204" pitchFamily="34" charset="0"/>
-              </a:rPr>
-              <a:t/>
-            </a:r>
-            <a:r>
-              <a:rPr lang="en-ID" dirty="0">
-                <a:latin typeface="Arial" panose="020B0604020202020204" pitchFamily="34" charset="0"/>
-                <a:cs typeface="Arial" panose="020B0604020202020204" pitchFamily="34" charset="0"/>
-              </a:rPr>
-              <a:t/>
-            </a:r>
-            <a:r>
-              <a:rPr lang="en-ID" dirty="0" err="1">
-                <a:latin typeface="Arial" panose="020B0604020202020204" pitchFamily="34" charset="0"/>
-                <a:cs typeface="Arial" panose="020B0604020202020204" pitchFamily="34" charset="0"/>
-              </a:rPr>
-              <a:t/>
-            </a:r>
-            <a:r>
-              <a:rPr lang="en-ID" dirty="0">
-                <a:latin typeface="Arial" panose="020B0604020202020204" pitchFamily="34" charset="0"/>
-                <a:cs typeface="Arial" panose="020B0604020202020204" pitchFamily="34" charset="0"/>
-              </a:rPr>
-              <a:t/>
-            </a:r>
-            <a:r>
-              <a:rPr lang="en-ID" dirty="0" err="1">
-                <a:latin typeface="Arial" panose="020B0604020202020204" pitchFamily="34" charset="0"/>
-                <a:cs typeface="Arial" panose="020B0604020202020204" pitchFamily="34" charset="0"/>
-              </a:rPr>
-              <a:t/>
-            </a:r>
-            <a:r>
-              <a:rPr lang="en-ID" dirty="0">
-                <a:latin typeface="Arial" panose="020B0604020202020204" pitchFamily="34" charset="0"/>
-                <a:cs typeface="Arial" panose="020B0604020202020204" pitchFamily="34" charset="0"/>
-              </a:rPr>
-              <a:t/>
-            </a:r>
-            <a:r>
-              <a:rPr lang="en-ID" dirty="0" err="1">
-                <a:latin typeface="Arial" panose="020B0604020202020204" pitchFamily="34" charset="0"/>
-                <a:cs typeface="Arial" panose="020B0604020202020204" pitchFamily="34" charset="0"/>
-              </a:rPr>
-              <a:t/>
-            </a:r>
-            <a:r>
-              <a:rPr lang="en-ID" dirty="0">
-                <a:latin typeface="Arial" panose="020B0604020202020204" pitchFamily="34" charset="0"/>
-                <a:cs typeface="Arial" panose="020B0604020202020204" pitchFamily="34" charset="0"/>
-              </a:rPr>
-              <a:t/>
-            </a:r>
-            <a:r>
-              <a:rPr lang="en-ID" dirty="0" err="1">
-                <a:latin typeface="Arial" panose="020B0604020202020204" pitchFamily="34" charset="0"/>
-                <a:cs typeface="Arial" panose="020B0604020202020204" pitchFamily="34" charset="0"/>
-              </a:rPr>
-              <a:t/>
-            </a:r>
-            <a:r>
-              <a:rPr lang="en-ID" dirty="0">
-                <a:latin typeface="Arial" panose="020B0604020202020204" pitchFamily="34" charset="0"/>
-                <a:cs typeface="Arial" panose="020B0604020202020204" pitchFamily="34" charset="0"/>
-              </a:rPr>
-              <a:t/>
-            </a:r>
-            <a:r>
-              <a:rPr lang="en-ID" b="1" dirty="0">
-                <a:latin typeface="Arial" panose="020B0604020202020204" pitchFamily="34" charset="0"/>
-                <a:cs typeface="Arial" panose="020B0604020202020204" pitchFamily="34" charset="0"/>
-              </a:rPr>
-              <a:t/>
-            </a:r>
-            <a:r>
-              <a:rPr lang="en-ID" dirty="0">
-                <a:latin typeface="Arial" panose="020B0604020202020204" pitchFamily="34" charset="0"/>
-                <a:cs typeface="Arial" panose="020B0604020202020204" pitchFamily="34" charset="0"/>
-              </a:rPr>
-              <a:t/>
-            </a:r>
-            <a:r>
-              <a:rPr lang="en-ID" dirty="0" err="1">
-                <a:latin typeface="Arial" panose="020B0604020202020204" pitchFamily="34" charset="0"/>
-                <a:cs typeface="Arial" panose="020B0604020202020204" pitchFamily="34" charset="0"/>
-              </a:rPr>
-              <a:t/>
-            </a:r>
-            <a:r>
-              <a:rPr lang="en-ID" dirty="0">
-                <a:latin typeface="Arial" panose="020B0604020202020204" pitchFamily="34" charset="0"/>
-                <a:cs typeface="Arial" panose="020B0604020202020204" pitchFamily="34" charset="0"/>
-              </a:rPr>
-              <a:t/>
-            </a:r>
-            <a:r>
-              <a:rPr lang="en-ID" dirty="0" err="1">
-                <a:latin typeface="Arial" panose="020B0604020202020204" pitchFamily="34" charset="0"/>
-                <a:cs typeface="Arial" panose="020B0604020202020204" pitchFamily="34" charset="0"/>
-              </a:rPr>
-              <a:t/>
-            </a:r>
-            <a:r>
-              <a:rPr lang="en-ID" dirty="0">
-                <a:latin typeface="Arial" panose="020B0604020202020204" pitchFamily="34" charset="0"/>
-                <a:cs typeface="Arial" panose="020B0604020202020204" pitchFamily="34" charset="0"/>
-              </a:rPr>
-              <a:t/>
-            </a:r>
-            <a:r>
-              <a:rPr lang="en-ID" dirty="0" err="1">
-                <a:latin typeface="Arial" panose="020B0604020202020204" pitchFamily="34" charset="0"/>
-                <a:cs typeface="Arial" panose="020B0604020202020204" pitchFamily="34" charset="0"/>
-              </a:rPr>
-              <a:t/>
-            </a:r>
-            <a:r>
-              <a:rPr lang="en-ID" dirty="0">
-                <a:latin typeface="Arial" panose="020B0604020202020204" pitchFamily="34" charset="0"/>
-                <a:cs typeface="Arial" panose="020B0604020202020204" pitchFamily="34" charset="0"/>
-              </a:rPr>
-              <a:t/>
-            </a:r>
-            <a:r>
-              <a:rPr lang="en-ID" dirty="0" err="1">
-                <a:latin typeface="Arial" panose="020B0604020202020204" pitchFamily="34" charset="0"/>
-                <a:cs typeface="Arial" panose="020B0604020202020204" pitchFamily="34" charset="0"/>
-              </a:rPr>
-              <a:t/>
-            </a:r>
-            <a:r>
-              <a:rPr lang="en-ID" dirty="0">
-                <a:latin typeface="Arial" panose="020B0604020202020204" pitchFamily="34" charset="0"/>
-                <a:cs typeface="Arial" panose="020B0604020202020204" pitchFamily="34" charset="0"/>
-              </a:rPr>
-              <a:t/>
-            </a:r>
-            <a:r>
-              <a:rPr lang="en-ID" dirty="0" err="1">
-                <a:latin typeface="Arial" panose="020B0604020202020204" pitchFamily="34" charset="0"/>
-                <a:cs typeface="Arial" panose="020B0604020202020204" pitchFamily="34" charset="0"/>
-              </a:rPr>
-              <a:t/>
-            </a:r>
-            <a:r>
-              <a:rPr lang="en-ID" dirty="0">
-                <a:latin typeface="Arial" panose="020B0604020202020204" pitchFamily="34" charset="0"/>
-                <a:cs typeface="Arial" panose="020B0604020202020204" pitchFamily="34" charset="0"/>
-              </a:rPr>
-              <a:t/>
-            </a:r>
-            <a:r>
-              <a:rPr lang="en-ID" dirty="0" err="1">
-                <a:latin typeface="Arial" panose="020B0604020202020204" pitchFamily="34" charset="0"/>
-                <a:cs typeface="Arial" panose="020B0604020202020204" pitchFamily="34" charset="0"/>
-              </a:rPr>
-              <a:t/>
-            </a:r>
-            <a:r>
-              <a:rPr lang="en-ID" dirty="0">
-                <a:latin typeface="Arial" panose="020B0604020202020204" pitchFamily="34" charset="0"/>
-                <a:cs typeface="Arial" panose="020B0604020202020204" pitchFamily="34" charset="0"/>
-              </a:rPr>
-              <a:t/>
-            </a:r>
-            <a:r>
-              <a:rPr lang="en-ID" dirty="0" err="1">
-                <a:latin typeface="Arial" panose="020B0604020202020204" pitchFamily="34" charset="0"/>
-                <a:cs typeface="Arial" panose="020B0604020202020204" pitchFamily="34" charset="0"/>
-              </a:rPr>
-              <a:t/>
-            </a:r>
-            <a:r>
-              <a:rPr lang="en-ID" dirty="0">
-                <a:latin typeface="Arial" panose="020B0604020202020204" pitchFamily="34" charset="0"/>
-                <a:cs typeface="Arial" panose="020B0604020202020204" pitchFamily="34" charset="0"/>
-              </a:rPr>
-              <a:t/>
-            </a:r>
-            <a:r>
-              <a:rPr lang="en-ID" dirty="0" err="1">
-                <a:latin typeface="Arial" panose="020B0604020202020204" pitchFamily="34" charset="0"/>
-                <a:cs typeface="Arial" panose="020B0604020202020204" pitchFamily="34" charset="0"/>
-              </a:rPr>
-              <a:t/>
-            </a:r>
-            <a:r>
-              <a:rPr lang="en-ID" dirty="0">
-                <a:latin typeface="Arial" panose="020B0604020202020204" pitchFamily="34" charset="0"/>
-                <a:cs typeface="Arial" panose="020B0604020202020204" pitchFamily="34" charset="0"/>
-              </a:rPr>
-              <a:t/>
-            </a:r>
-            <a:r>
-              <a:rPr lang="en-ID" dirty="0" err="1">
-                <a:latin typeface="Arial" panose="020B0604020202020204" pitchFamily="34" charset="0"/>
-                <a:cs typeface="Arial" panose="020B0604020202020204" pitchFamily="34" charset="0"/>
-              </a:rPr>
-              <a:t/>
-            </a:r>
-            <a:r>
-              <a:rPr lang="en-ID" dirty="0">
-                <a:latin typeface="Arial" panose="020B0604020202020204" pitchFamily="34" charset="0"/>
-                <a:cs typeface="Arial" panose="020B0604020202020204" pitchFamily="34" charset="0"/>
-              </a:rPr>
-              <a:t/>
-            </a:r>
-            <a:r>
-              <a:rPr lang="en-ID" dirty="0" err="1">
-                <a:latin typeface="Arial" panose="020B0604020202020204" pitchFamily="34" charset="0"/>
-                <a:cs typeface="Arial" panose="020B0604020202020204" pitchFamily="34" charset="0"/>
-              </a:rPr>
-              <a:t/>
-            </a:r>
-            <a:r>
-              <a:rPr lang="en-ID" dirty="0">
-                <a:latin typeface="Arial" panose="020B0604020202020204" pitchFamily="34" charset="0"/>
-                <a:cs typeface="Arial" panose="020B0604020202020204" pitchFamily="34" charset="0"/>
-              </a:rPr>
-              <a:t/>
-            </a:r>
-            <a:r>
-              <a:rPr lang="en-ID" dirty="0" err="1">
-                <a:latin typeface="Arial" panose="020B0604020202020204" pitchFamily="34" charset="0"/>
-                <a:cs typeface="Arial" panose="020B0604020202020204" pitchFamily="34" charset="0"/>
-              </a:rPr>
-              <a:t/>
-            </a:r>
-            <a:r>
-              <a:rPr lang="en-ID" dirty="0">
-                <a:latin typeface="Arial" panose="020B0604020202020204" pitchFamily="34" charset="0"/>
-                <a:cs typeface="Arial" panose="020B0604020202020204" pitchFamily="34" charset="0"/>
-              </a:rPr>
-              <a:t/>
-            </a:r>
-            <a:r>
-              <a:rPr lang="en-ID" dirty="0" err="1">
-                <a:latin typeface="Arial" panose="020B0604020202020204" pitchFamily="34" charset="0"/>
-                <a:cs typeface="Arial" panose="020B0604020202020204" pitchFamily="34" charset="0"/>
-              </a:rPr>
-              <a:t/>
-            </a:r>
-            <a:r>
-              <a:rPr lang="en-ID" dirty="0">
-                <a:latin typeface="Arial" panose="020B0604020202020204" pitchFamily="34" charset="0"/>
-                <a:cs typeface="Arial" panose="020B0604020202020204" pitchFamily="34" charset="0"/>
-              </a:rPr>
-              <a:t/>
-            </a:r>
-            <a:r>
-              <a:rPr lang="en-ID" dirty="0" err="1">
-                <a:latin typeface="Arial" panose="020B0604020202020204" pitchFamily="34" charset="0"/>
-                <a:cs typeface="Arial" panose="020B0604020202020204" pitchFamily="34" charset="0"/>
-              </a:rPr>
-              <a:t/>
-            </a:r>
-            <a:r>
-              <a:rPr lang="en-ID" dirty="0">
-                <a:latin typeface="Arial" panose="020B0604020202020204" pitchFamily="34" charset="0"/>
-                <a:cs typeface="Arial" panose="020B0604020202020204" pitchFamily="34" charset="0"/>
-              </a:rPr>
-              <a:t/>
-            </a:r>
-            <a:r>
-              <a:rPr lang="en-ID" dirty="0" err="1">
-                <a:latin typeface="Arial" panose="020B0604020202020204" pitchFamily="34" charset="0"/>
-                <a:cs typeface="Arial" panose="020B0604020202020204" pitchFamily="34" charset="0"/>
-              </a:rPr>
-              <a:t/>
-            </a:r>
-            <a:r>
-              <a:rPr lang="en-ID" dirty="0">
-                <a:latin typeface="Arial" panose="020B0604020202020204" pitchFamily="34" charset="0"/>
-                <a:cs typeface="Arial" panose="020B0604020202020204" pitchFamily="34" charset="0"/>
-              </a:rPr>
-              <a:t/>
-            </a:r>
-            <a:r>
-              <a:rPr lang="en-ID" dirty="0" err="1">
-                <a:latin typeface="Arial" panose="020B0604020202020204" pitchFamily="34" charset="0"/>
-                <a:cs typeface="Arial" panose="020B0604020202020204" pitchFamily="34" charset="0"/>
-              </a:rPr>
-              <a:t/>
-            </a:r>
-            <a:r>
-              <a:rPr lang="en-ID" dirty="0">
-                <a:latin typeface="Arial" panose="020B0604020202020204" pitchFamily="34" charset="0"/>
-                <a:cs typeface="Arial" panose="020B0604020202020204" pitchFamily="34" charset="0"/>
-              </a:rPr>
-              <a:t/>
-            </a:r>
-            <a:r>
-              <a:rPr lang="en-ID" dirty="0" err="1">
-                <a:latin typeface="Arial" panose="020B0604020202020204" pitchFamily="34" charset="0"/>
-                <a:cs typeface="Arial" panose="020B0604020202020204" pitchFamily="34" charset="0"/>
-              </a:rPr>
-              <a:t/>
-            </a:r>
-            <a:r>
-              <a:rPr lang="en-ID" dirty="0">
-                <a:latin typeface="Arial" panose="020B0604020202020204" pitchFamily="34" charset="0"/>
-                <a:cs typeface="Arial" panose="020B0604020202020204" pitchFamily="34" charset="0"/>
-              </a:rPr>
-              <a:t/>
-            </a:r>
-            <a:r>
-              <a:rPr lang="en-ID" dirty="0" err="1">
-                <a:latin typeface="Arial" panose="020B0604020202020204" pitchFamily="34" charset="0"/>
-                <a:cs typeface="Arial" panose="020B0604020202020204" pitchFamily="34" charset="0"/>
-              </a:rPr>
-              <a:t/>
-            </a:r>
-            <a:r>
-              <a:rPr lang="en-ID" dirty="0">
-                <a:latin typeface="Arial" panose="020B0604020202020204" pitchFamily="34" charset="0"/>
-                <a:cs typeface="Arial" panose="020B0604020202020204" pitchFamily="34" charset="0"/>
-              </a:rPr>
-              <a:t/>
-            </a:r>
-            <a:r>
-              <a:rPr lang="en-ID" dirty="0" err="1">
-                <a:latin typeface="Arial" panose="020B0604020202020204" pitchFamily="34" charset="0"/>
-                <a:cs typeface="Arial" panose="020B0604020202020204" pitchFamily="34" charset="0"/>
-              </a:rPr>
-              <a:t/>
-            </a:r>
-            <a:r>
-              <a:rPr lang="en-ID" dirty="0">
-                <a:latin typeface="Arial" panose="020B0604020202020204" pitchFamily="34" charset="0"/>
-                <a:cs typeface="Arial" panose="020B0604020202020204" pitchFamily="34" charset="0"/>
-              </a:rPr>
-              <a:t/>
-            </a:r>
-            <a:r>
-              <a:rPr lang="en-ID" dirty="0" err="1">
-                <a:latin typeface="Arial" panose="020B0604020202020204" pitchFamily="34" charset="0"/>
-                <a:cs typeface="Arial" panose="020B0604020202020204" pitchFamily="34" charset="0"/>
-              </a:rPr>
-              <a:t/>
-            </a:r>
-            <a:r>
-              <a:rPr lang="en-ID" dirty="0">
-                <a:latin typeface="Arial" panose="020B0604020202020204" pitchFamily="34" charset="0"/>
-                <a:cs typeface="Arial" panose="020B0604020202020204" pitchFamily="34" charset="0"/>
-              </a:rPr>
-              <a:t/>
-            </a:r>
-            <a:r>
-              <a:rPr lang="en-ID" dirty="0" err="1">
-                <a:latin typeface="Arial" panose="020B0604020202020204" pitchFamily="34" charset="0"/>
-                <a:cs typeface="Arial" panose="020B0604020202020204" pitchFamily="34" charset="0"/>
-              </a:rPr>
-              <a:t/>
-            </a:r>
-            <a:r>
-              <a:rPr lang="en-ID" dirty="0">
-                <a:latin typeface="Arial" panose="020B0604020202020204" pitchFamily="34" charset="0"/>
-                <a:cs typeface="Arial" panose="020B0604020202020204" pitchFamily="34" charset="0"/>
-              </a:rPr>
-              <a:t/>
-            </a:r>
-            <a:r>
-              <a:rPr lang="en-ID" dirty="0" err="1">
-                <a:latin typeface="Arial" panose="020B0604020202020204" pitchFamily="34" charset="0"/>
-                <a:cs typeface="Arial" panose="020B0604020202020204" pitchFamily="34" charset="0"/>
-              </a:rPr>
-              <a:t/>
-            </a:r>
-            <a:r>
-              <a:rPr lang="en-ID" dirty="0">
-                <a:latin typeface="Arial" panose="020B0604020202020204" pitchFamily="34" charset="0"/>
-                <a:cs typeface="Arial" panose="020B0604020202020204" pitchFamily="34" charset="0"/>
-              </a:rPr>
-              <a:t/>
             </a:r>
           </a:p>
         </p:txBody>
@@ -7105,7 +5917,7 @@
     </a:clrScheme>
     <a:fontScheme name="Office">
       <a:majorFont>
-        <a:latin typeface="Calibri Light" panose="020F0302020204030204"/>
+        <a:latin typeface="Arial"/>
         <a:ea typeface=""/>
         <a:cs typeface=""/>
         <a:font script="Jpan" typeface="游ゴシック Light"/>
@@ -7157,7 +5969,7 @@
         <a:font script="Tfng" typeface="Ebrima"/>
       </a:majorFont>
       <a:minorFont>
-        <a:latin typeface="Calibri" panose="020F0502020204030204"/>
+        <a:latin typeface="Arial"/>
         <a:ea typeface=""/>
         <a:cs typeface=""/>
         <a:font script="Jpan" typeface="游ゴシック"/>
